--- a/assets/pptx/catalog-571.pptx
+++ b/assets/pptx/catalog-571.pptx
@@ -3406,7 +3406,7 @@
                 <a:ea typeface="Ebrima"/>
                 <a:cs typeface="Ebrima"/>
               </a:rPr>
-              <a:t>ተደንቂያለሁኝ ወደ እኔ ስትመጣ (2x)</a:t>
+              <a:t>ተደንቂያለሁኝ ወደ እኔ ስትመጣ 2x</a:t>
             </a:r>
           </a:p>
         </p:txBody>
@@ -3607,7 +3607,7 @@
                 <a:ea typeface="Ebrima"/>
                 <a:cs typeface="Ebrima"/>
               </a:rPr>
-              <a:t>እከፍላለሁ አሃ ለአንተ ምሥጋና (2x)</a:t>
+              <a:t>እከፍላለሁ አሃ ለአንተ ምሥጋና 2x</a:t>
             </a:r>
           </a:p>
         </p:txBody>
@@ -3808,7 +3808,7 @@
                 <a:ea typeface="Ebrima"/>
                 <a:cs typeface="Ebrima"/>
               </a:rPr>
-              <a:t>ኢሄም ያንስበታል ለዚህ ጌታ (2x)</a:t>
+              <a:t>ኢሄም ያንስበታል ለዚህ ጌታ 2x</a:t>
             </a:r>
           </a:p>
         </p:txBody>
@@ -4679,7 +4679,7 @@
                 <a:ea typeface="Ebrima"/>
                 <a:cs typeface="Ebrima"/>
               </a:rPr>
-              <a:t>ተደንቂያለሁኝ ወደ እኔ ስትመጣ (2x)</a:t>
+              <a:t>ተደንቂያለሁኝ ወደ እኔ ስትመጣ 2x</a:t>
             </a:r>
           </a:p>
         </p:txBody>
@@ -4746,7 +4746,7 @@
                 <a:ea typeface="Ebrima"/>
                 <a:cs typeface="Ebrima"/>
               </a:rPr>
-              <a:t>እከፍላለሁ አሃ ለአንተ ምሥጋና (2x)</a:t>
+              <a:t>እከፍላለሁ አሃ ለአንተ ምሥጋና 2x</a:t>
             </a:r>
           </a:p>
         </p:txBody>
@@ -4947,7 +4947,7 @@
                 <a:ea typeface="Ebrima"/>
                 <a:cs typeface="Ebrima"/>
               </a:rPr>
-              <a:t>(2x)</a:t>
+              <a:t>2x</a:t>
             </a:r>
           </a:p>
         </p:txBody>
@@ -5148,7 +5148,7 @@
                 <a:ea typeface="Ebrima"/>
                 <a:cs typeface="Ebrima"/>
               </a:rPr>
-              <a:t>ይኸው አስደነከኝ እንዲህ አድርገህ (2x)</a:t>
+              <a:t>ይኸው አስደነከኝ እንዲህ አድርገህ 2x</a:t>
             </a:r>
           </a:p>
         </p:txBody>
@@ -5349,7 +5349,7 @@
                 <a:ea typeface="Ebrima"/>
                 <a:cs typeface="Ebrima"/>
               </a:rPr>
-              <a:t>አስደናቂ ነገር ይኸው አደረገ (2x)</a:t>
+              <a:t>አስደናቂ ነገር ይኸው አደረገ 2x</a:t>
             </a:r>
           </a:p>
         </p:txBody>
